--- a/应急小达人_国赛参赛作品_扩展版.pptx
+++ b/应急小达人_国赛参赛作品_扩展版.pptx
@@ -5453,6 +5453,23 @@
             </a:r>
             <a:endParaRPr lang="en-US" sz="1200" dirty="0"/>
           </a:p>
+          <a:p>
+            <a:pPr indent="0" marL="0">
+              <a:buNone/>
+            </a:pPr>
+            <a:r>
+              <a:rPr lang="en-US" sz="1200" dirty="0">
+                <a:solidFill>
+                  <a:srgbClr val="64748B"/>
+                </a:solidFill>
+                <a:latin typeface="Calibri" pitchFamily="34" charset="0"/>
+                <a:ea typeface="Calibri" pitchFamily="34" charset="-122"/>
+                <a:cs typeface="Calibri" pitchFamily="34" charset="-120"/>
+              </a:rPr>
+              <a:t>项目仓库：github.com/yaohanbo1-hue/yingji-xiaodaren</a:t>
+            </a:r>
+            <a:endParaRPr lang="en-US" sz="1200" dirty="0"/>
+          </a:p>
         </p:txBody>
       </p:sp>
     </p:spTree>
@@ -34020,7 +34037,7 @@
                 <a:ea typeface="Calibri" pitchFamily="34" charset="-122"/>
                 <a:cs typeface="Calibri" pitchFamily="34" charset="-120"/>
               </a:rPr>
-              <a:t>在线版：https://yaohanbo1-hue.github.io/yingji-xiaodaren/</a:t>
+              <a:t>在线体验：https://yaohanbo1-hue.github.io/yingji-xiaodaren/</a:t>
             </a:r>
             <a:endParaRPr lang="en-US" sz="1200" dirty="0"/>
           </a:p>
@@ -34035,6 +34052,45 @@
         <p:spPr>
           <a:xfrm>
             <a:off x="731520" y="4160520"/>
+            <a:ext cx="7680960" cy="320040"/>
+          </a:xfrm>
+          <a:prstGeom prst="rect">
+            <a:avLst/>
+          </a:prstGeom>
+          <a:noFill/>
+          <a:ln/>
+        </p:spPr>
+        <p:txBody>
+          <a:bodyPr wrap="square" lIns="0" tIns="0" rIns="0" bIns="0" rtlCol="0" anchor="ctr"/>
+          <a:lstStyle/>
+          <a:p>
+            <a:pPr indent="0" marL="0">
+              <a:buNone/>
+            </a:pPr>
+            <a:r>
+              <a:rPr lang="en-US" sz="1200" b="1" dirty="0">
+                <a:solidFill>
+                  <a:srgbClr val="3B82F6"/>
+                </a:solidFill>
+                <a:latin typeface="Calibri" pitchFamily="34" charset="0"/>
+                <a:ea typeface="Calibri" pitchFamily="34" charset="-122"/>
+                <a:cs typeface="Calibri" pitchFamily="34" charset="-120"/>
+              </a:rPr>
+              <a:t>项目仓库：https://github.com/yaohanbo1-hue/yingji-xiaodaren</a:t>
+            </a:r>
+            <a:endParaRPr lang="en-US" sz="1200" dirty="0"/>
+          </a:p>
+        </p:txBody>
+      </p:sp>
+      <p:sp>
+        <p:nvSpPr>
+          <p:cNvPr id="14" name="Text 12"/>
+          <p:cNvSpPr/>
+          <p:nvPr/>
+        </p:nvSpPr>
+        <p:spPr>
+          <a:xfrm>
+            <a:off x="731520" y="4526280"/>
             <a:ext cx="7680960" cy="320040"/>
           </a:xfrm>
           <a:prstGeom prst="rect">
@@ -35137,6 +35193,45 @@
                 <a:cs typeface="Calibri" pitchFamily="34" charset="-120"/>
               </a:rPr>
               <a:t>在线体验：https://yaohanbo1-hue.github.io/yingji-xiaodaren/</a:t>
+            </a:r>
+            <a:endParaRPr lang="en-US" sz="1200" dirty="0"/>
+          </a:p>
+        </p:txBody>
+      </p:sp>
+      <p:sp>
+        <p:nvSpPr>
+          <p:cNvPr id="10" name="Text 8"/>
+          <p:cNvSpPr/>
+          <p:nvPr/>
+        </p:nvSpPr>
+        <p:spPr>
+          <a:xfrm>
+            <a:off x="914400" y="4572000"/>
+            <a:ext cx="7315200" cy="457200"/>
+          </a:xfrm>
+          <a:prstGeom prst="rect">
+            <a:avLst/>
+          </a:prstGeom>
+          <a:noFill/>
+          <a:ln/>
+        </p:spPr>
+        <p:txBody>
+          <a:bodyPr wrap="square" lIns="0" tIns="0" rIns="0" bIns="0" rtlCol="0" anchor="ctr"/>
+          <a:lstStyle/>
+          <a:p>
+            <a:pPr algn="ctr" indent="0" marL="0">
+              <a:buNone/>
+            </a:pPr>
+            <a:r>
+              <a:rPr lang="en-US" sz="1200" dirty="0">
+                <a:solidFill>
+                  <a:srgbClr val="3B82F6"/>
+                </a:solidFill>
+                <a:latin typeface="Calibri" pitchFamily="34" charset="0"/>
+                <a:ea typeface="Calibri" pitchFamily="34" charset="-122"/>
+                <a:cs typeface="Calibri" pitchFamily="34" charset="-120"/>
+              </a:rPr>
+              <a:t>项目仓库：https://github.com/yaohanbo1-hue/yingji-xiaodaren</a:t>
             </a:r>
             <a:endParaRPr lang="en-US" sz="1200" dirty="0"/>
           </a:p>
